--- a/NovaWallet_Send_and_Save_Ayorinde_Michael_Olamiposi.pptx
+++ b/NovaWallet_Send_and_Save_Ayorinde_Michael_Olamiposi.pptx
@@ -6687,7 +6687,7 @@
                 </a:solidFill>
                 <a:latin typeface="Helvetica Neue"/>
               </a:rPr>
-              <a:t>65 PASSING</a:t>
+              <a:t>72 PASSING</a:t>
             </a:r>
           </a:p>
         </p:txBody>
